--- a/Slides/Phase2_Phase3_Stakeholder_Deck.pptx
+++ b/Slides/Phase2_Phase3_Stakeholder_Deck.pptx
@@ -1162,7 +1162,7 @@
           <a:lstStyle/>
           <a:p>
             <a:r>
-              <a:t>Clearance remains near target while binding, hERG, and Caco-2 are still below required thresholds. Current direction prioritizes targeted classification-task fine-tuning.</a:t>
+              <a:t>Clearance remains near target while binding, hERG, and Caco-2 are still below required thresholds. Current direction prioritizes split-leakage mitigation and re-benchmarking.</a:t>
             </a:r>
           </a:p>
         </p:txBody>
@@ -1372,7 +1372,7 @@
           <a:lstStyle/>
           <a:p>
             <a:r>
-              <a:t>Fine-tuning targeted heads is the shortest path to improving classification metrics while preserving the stability of the shared representation.</a:t>
+              <a:t>Leakage control is the highest-impact next step to ensure reported gains are trustworthy and comparable.</a:t>
             </a:r>
           </a:p>
         </p:txBody>
@@ -5598,7 +5598,7 @@
                   <a:srgbClr val="BBBBBB"/>
                 </a:solidFill>
               </a:rPr>
-              <a:t>Subrat  •  Sushree2179/Neural_PK-PD_Modeling_with_ODE    |    Snapshot: March 4, 2026</a:t>
+              <a:t>Subrat  •  Sushree2179/Neural_PK-PD_Modeling_with_ODE    |    Snapshot: March 8, 2026</a:t>
             </a:r>
           </a:p>
         </p:txBody>
@@ -8372,7 +8372,7 @@
                   <a:srgbClr val="333333"/>
                 </a:solidFill>
               </a:rPr>
-              <a:t>•  Multiple controlled variants compared (deep-head, focal, logits + threshold tuning)</a:t>
+              <a:t>•  Multiple controlled variants compared (deep-head, focal/logits, fine-tuning variants)</a:t>
             </a:r>
           </a:p>
           <a:p>
@@ -8390,7 +8390,7 @@
                   <a:srgbClr val="333333"/>
                 </a:solidFill>
               </a:rPr>
-              <a:t>•  Caco-2 objective aligned to classification in active benchmark track</a:t>
+              <a:t>•  Concrete quality gate + constrained threshold calibration executed</a:t>
             </a:r>
           </a:p>
           <a:p>
@@ -8408,7 +8408,25 @@
                   <a:srgbClr val="333333"/>
                 </a:solidFill>
               </a:rPr>
-              <a:t>•  Common benchmark table maintained across runs for comparability</a:t>
+              <a:t>•  Production threshold policy selected (hERG=0.49, Caco-2=0.50)</a:t>
+            </a:r>
+          </a:p>
+          <a:p>
+            <a:pPr>
+              <a:spcBef>
+                <a:spcPts val="1000"/>
+              </a:spcBef>
+              <a:spcAft>
+                <a:spcPts val="400"/>
+              </a:spcAft>
+            </a:pPr>
+            <a:r>
+              <a:rPr sz="2200" b="0" i="0">
+                <a:solidFill>
+                  <a:srgbClr val="333333"/>
+                </a:solidFill>
+              </a:rPr>
+              <a:t>•  Locked-threshold reporting cell now used for final benchmark table</a:t>
             </a:r>
           </a:p>
           <a:p>
@@ -8759,7 +8777,7 @@
                   <a:srgbClr val="FFFFFF"/>
                 </a:solidFill>
               </a:rPr>
-              <a:t>Latest Results vs Targets (March 4, 2026)</a:t>
+              <a:t>Latest Results vs Targets (March 8, 2026)</a:t>
             </a:r>
           </a:p>
         </p:txBody>
@@ -8966,7 +8984,7 @@
                         </a:defRPr>
                       </a:pPr>
                       <a:r>
-                        <a:t>-0.029</a:t>
+                        <a:t>0.0019</a:t>
                       </a:r>
                     </a:p>
                   </a:txBody>
@@ -9083,7 +9101,7 @@
                         </a:defRPr>
                       </a:pPr>
                       <a:r>
-                        <a:t>0.482</a:t>
+                        <a:t>0.4836</a:t>
                       </a:r>
                     </a:p>
                   </a:txBody>
@@ -9200,7 +9218,7 @@
                         </a:defRPr>
                       </a:pPr>
                       <a:r>
-                        <a:t>0.518</a:t>
+                        <a:t>0.4719</a:t>
                       </a:r>
                     </a:p>
                   </a:txBody>
@@ -9317,7 +9335,7 @@
                         </a:defRPr>
                       </a:pPr>
                       <a:r>
-                        <a:t>0.969</a:t>
+                        <a:t>0.9766</a:t>
                       </a:r>
                     </a:p>
                   </a:txBody>
@@ -9560,7 +9578,7 @@
                   <a:srgbClr val="333333"/>
                 </a:solidFill>
               </a:rPr>
-              <a:t>•  Latest feature integration and reproducible handoff are in place</a:t>
+              <a:t>•  Latest feature integration, quality gate, and threshold governance are in place</a:t>
             </a:r>
           </a:p>
           <a:p>
@@ -9596,7 +9614,7 @@
                   <a:srgbClr val="333333"/>
                 </a:solidFill>
               </a:rPr>
-              <a:t>•  Next gains likely come from targeted fine-tuning before major architecture changes</a:t>
+              <a:t>•  Next gains likely come from split-leakage mitigation before major architecture changes</a:t>
             </a:r>
           </a:p>
         </p:txBody>
@@ -9706,7 +9724,7 @@
                   <a:srgbClr val="FFFFFF"/>
                 </a:solidFill>
               </a:rPr>
-              <a:t>Primary Next Action: Task-Specific Fine-Tuning</a:t>
+              <a:t>Primary Next Action: Split-Leakage Mitigation</a:t>
             </a:r>
           </a:p>
         </p:txBody>
@@ -9747,7 +9765,7 @@
                   <a:srgbClr val="333333"/>
                 </a:solidFill>
               </a:rPr>
-              <a:t>•  Freeze shared encoder and Neural ODE backbone</a:t>
+              <a:t>•  Correct data split strategy for leakage-prone tasks (starting with binding)</a:t>
             </a:r>
           </a:p>
           <a:p>
@@ -9765,7 +9783,7 @@
                   <a:srgbClr val="333333"/>
                 </a:solidFill>
               </a:rPr>
-              <a:t>•  Fine-tune hERG and Caco-2 heads/task losses in focused runs</a:t>
+              <a:t>•  Re-run quality gate to confirm zero exact-overlap leakage</a:t>
             </a:r>
           </a:p>
           <a:p>
@@ -9783,7 +9801,7 @@
                   <a:srgbClr val="333333"/>
                 </a:solidFill>
               </a:rPr>
-              <a:t>•  Tune decision thresholds and monitor AUROC/F1 jointly</a:t>
+              <a:t>•  Keep locked production thresholds for consistent classification reporting</a:t>
             </a:r>
           </a:p>
           <a:p>
@@ -9801,7 +9819,7 @@
                   <a:srgbClr val="333333"/>
                 </a:solidFill>
               </a:rPr>
-              <a:t>•  Compare against latest canonical benchmark table</a:t>
+              <a:t>•  Re-run benchmark and compare deltas vs March 8 snapshot</a:t>
             </a:r>
           </a:p>
           <a:p>
@@ -11006,7 +11024,7 @@
                   <a:srgbClr val="BBBBBB"/>
                 </a:solidFill>
               </a:rPr>
-              <a:t>Subrat    |    March 4, 2026</a:t>
+              <a:t>Subrat    |    March 8, 2026</a:t>
             </a:r>
           </a:p>
         </p:txBody>
